--- a/output/presentations/王宇航_技术面试汇报_初稿.pptx
+++ b/output/presentations/王宇航_技术面试汇报_初稿.pptx
@@ -5356,6 +5356,191 @@
           </a:p>
         </p:txBody>
       </p:sp>
+      <p:sp>
+        <p:nvSpPr>
+          <p:cNvPr id="32" name="文本框 31">
+            <a:extLst>
+              <a:ext uri="{FF2B5EF4-FFF2-40B4-BE49-F238E27FC236}">
+                <a16:creationId xmlns:a16="http://schemas.microsoft.com/office/drawing/2014/main" id="{0468543B-3279-ACF7-E1C0-AE602F25DA9F}"/>
+              </a:ext>
+            </a:extLst>
+          </p:cNvPr>
+          <p:cNvSpPr txBox="1"/>
+          <p:nvPr/>
+        </p:nvSpPr>
+        <p:spPr>
+          <a:xfrm>
+            <a:off x="6449531" y="4923856"/>
+            <a:ext cx="6098958" cy="352661"/>
+          </a:xfrm>
+          <a:prstGeom prst="rect">
+            <a:avLst/>
+          </a:prstGeom>
+          <a:noFill/>
+        </p:spPr>
+        <p:txBody>
+          <a:bodyPr wrap="square">
+            <a:spAutoFit/>
+          </a:bodyPr>
+          <a:lstStyle/>
+          <a:p>
+            <a:pPr algn="l">
+              <a:lnSpc>
+                <a:spcPct val="108000"/>
+              </a:lnSpc>
+              <a:buNone/>
+              <a:defRPr sz="1650" b="1">
+                <a:solidFill>
+                  <a:srgbClr val="102238"/>
+                </a:solidFill>
+                <a:latin typeface="PingFang SC"/>
+                <a:ea typeface="PingFang SC"/>
+                <a:cs typeface="PingFang SC"/>
+              </a:defRPr>
+            </a:pPr>
+            <a:r>
+              <a:rPr lang="zh-CN" altLang="en-US" sz="1650" b="1">
+                <a:solidFill>
+                  <a:srgbClr val="102238"/>
+                </a:solidFill>
+                <a:latin typeface="PingFang SC"/>
+                <a:ea typeface="PingFang SC"/>
+                <a:cs typeface="PingFang SC"/>
+              </a:rPr>
+              <a:t>语言水平 </a:t>
+            </a:r>
+          </a:p>
+        </p:txBody>
+      </p:sp>
+      <p:sp>
+        <p:nvSpPr>
+          <p:cNvPr id="33" name="矩形 32">
+            <a:extLst>
+              <a:ext uri="{FF2B5EF4-FFF2-40B4-BE49-F238E27FC236}">
+                <a16:creationId xmlns:a16="http://schemas.microsoft.com/office/drawing/2014/main" id="{1A6EAB79-4B35-C54D-052C-C7472179B4F7}"/>
+              </a:ext>
+            </a:extLst>
+          </p:cNvPr>
+          <p:cNvSpPr>
+            <a:spLocks noGrp="1"/>
+          </p:cNvSpPr>
+          <p:nvPr/>
+        </p:nvSpPr>
+        <p:spPr>
+          <a:xfrm>
+            <a:off x="8081406" y="4972050"/>
+            <a:ext cx="3333750" cy="552450"/>
+          </a:xfrm>
+          <a:prstGeom prst="rect">
+            <a:avLst/>
+          </a:prstGeom>
+          <a:noFill/>
+          <a:ln w="0">
+            <a:noFill/>
+          </a:ln>
+        </p:spPr>
+        <p:txBody>
+          <a:bodyPr wrap="square" lIns="0" tIns="0" rIns="0" bIns="0" anchor="t">
+            <a:noAutofit/>
+          </a:bodyPr>
+          <a:lstStyle/>
+          <a:p>
+            <a:pPr algn="l">
+              <a:lnSpc>
+                <a:spcPct val="108000"/>
+              </a:lnSpc>
+              <a:buNone/>
+              <a:defRPr sz="1425" b="0">
+                <a:solidFill>
+                  <a:srgbClr val="405266"/>
+                </a:solidFill>
+                <a:latin typeface="PingFang SC"/>
+                <a:ea typeface="PingFang SC"/>
+                <a:cs typeface="PingFang SC"/>
+              </a:defRPr>
+            </a:pPr>
+            <a:r>
+              <a:rPr lang="en-US" altLang="zh-CN" sz="1425" b="0">
+                <a:solidFill>
+                  <a:srgbClr val="405266"/>
+                </a:solidFill>
+                <a:latin typeface="PingFang SC"/>
+                <a:ea typeface="PingFang SC"/>
+                <a:cs typeface="PingFang SC"/>
+              </a:rPr>
+              <a:t>CET-4</a:t>
+            </a:r>
+            <a:r>
+              <a:rPr lang="zh-CN" altLang="en-US" sz="1425" b="0">
+                <a:solidFill>
+                  <a:srgbClr val="405266"/>
+                </a:solidFill>
+                <a:latin typeface="PingFang SC"/>
+                <a:ea typeface="PingFang SC"/>
+                <a:cs typeface="PingFang SC"/>
+              </a:rPr>
+              <a:t>  </a:t>
+            </a:r>
+            <a:r>
+              <a:rPr lang="en-US" altLang="zh-CN" sz="1425" b="0">
+                <a:solidFill>
+                  <a:srgbClr val="405266"/>
+                </a:solidFill>
+                <a:latin typeface="PingFang SC"/>
+                <a:ea typeface="PingFang SC"/>
+                <a:cs typeface="PingFang SC"/>
+              </a:rPr>
+              <a:t>CET-6</a:t>
+            </a:r>
+            <a:endParaRPr sz="1425" b="0">
+              <a:solidFill>
+                <a:srgbClr val="405266"/>
+              </a:solidFill>
+              <a:latin typeface="PingFang SC"/>
+              <a:ea typeface="PingFang SC"/>
+              <a:cs typeface="PingFang SC"/>
+            </a:endParaRPr>
+          </a:p>
+        </p:txBody>
+      </p:sp>
+      <p:sp>
+        <p:nvSpPr>
+          <p:cNvPr id="34" name="直线连接符 33">
+            <a:extLst>
+              <a:ext uri="{FF2B5EF4-FFF2-40B4-BE49-F238E27FC236}">
+                <a16:creationId xmlns:a16="http://schemas.microsoft.com/office/drawing/2014/main" id="{64377E4A-9921-C130-02C7-6E4C4FF5D7CC}"/>
+              </a:ext>
+            </a:extLst>
+          </p:cNvPr>
+          <p:cNvSpPr>
+            <a:spLocks noGrp="1"/>
+          </p:cNvSpPr>
+          <p:nvPr/>
+        </p:nvSpPr>
+        <p:spPr>
+          <a:xfrm>
+            <a:off x="6481206" y="4724067"/>
+            <a:ext cx="4819650" cy="0"/>
+          </a:xfrm>
+          <a:prstGeom prst="line">
+            <a:avLst/>
+          </a:prstGeom>
+          <a:noFill/>
+          <a:ln w="9525">
+            <a:solidFill>
+              <a:srgbClr val="D6E1E8"/>
+            </a:solidFill>
+            <a:prstDash val="solid"/>
+          </a:ln>
+        </p:spPr>
+        <p:txBody>
+          <a:bodyPr/>
+          <a:lstStyle/>
+          <a:p>
+            <a:endParaRPr lang="zh-CN" altLang="en-US"/>
+          </a:p>
+        </p:txBody>
+      </p:sp>
     </p:spTree>
     <p:extLst>
       <p:ext uri="{BB962C8B-B14F-4D97-AF65-F5344CB8AC3E}">
@@ -7040,7 +7225,7 @@
                 <a:ea typeface="PingFang SC"/>
                 <a:cs typeface="PingFang SC"/>
               </a:rPr>
-              <a:t>参数化曲线 OPC 与 SRAF</a:t>
+              <a:t>参数化曲线 OPC </a:t>
             </a:r>
           </a:p>
         </p:txBody>
@@ -9625,7 +9810,7 @@
                 <a:ea typeface="PingFang SC"/>
                 <a:cs typeface="PingFang SC"/>
               </a:rPr>
-              <a:t>科研成果与岗位匹配</a:t>
+              <a:t>科研成果</a:t>
             </a:r>
           </a:p>
         </p:txBody>
@@ -10465,109 +10650,6 @@
                 <a:cs typeface="PingFang SC"/>
               </a:rPr>
               <a:t>仿真自动化与预测模型</a:t>
-            </a:r>
-          </a:p>
-        </p:txBody>
-      </p:sp>
-      <p:sp>
-        <p:nvSpPr>
-          <p:cNvPr id="15" name="圆角矩形 14">
-            <a:extLst>
-              <a:ext uri="{FF2B5EF4-FFF2-40B4-BE49-F238E27FC236}">
-                <a16:creationId xmlns:a16="http://schemas.microsoft.com/office/drawing/2014/main" id="{0B7437FA-AC64-4E00-9719-23B3D77ED572}"/>
-              </a:ext>
-            </a:extLst>
-          </p:cNvPr>
-          <p:cNvSpPr>
-            <a:spLocks noGrp="1"/>
-          </p:cNvSpPr>
-          <p:nvPr/>
-        </p:nvSpPr>
-        <p:spPr>
-          <a:xfrm>
-            <a:off x="7086600" y="4857750"/>
-            <a:ext cx="4267200" cy="876300"/>
-          </a:xfrm>
-          <a:prstGeom prst="roundRect">
-            <a:avLst>
-              <a:gd name="adj" fmla="val 19565"/>
-            </a:avLst>
-          </a:prstGeom>
-          <a:solidFill>
-            <a:srgbClr val="EAF3F9"/>
-          </a:solidFill>
-          <a:ln w="9525">
-            <a:solidFill>
-              <a:srgbClr val="EAF3F9"/>
-            </a:solidFill>
-            <a:prstDash val="solid"/>
-          </a:ln>
-        </p:spPr>
-        <p:txBody>
-          <a:bodyPr/>
-          <a:lstStyle/>
-          <a:p>
-            <a:endParaRPr lang="zh-CN" altLang="en-US"/>
-          </a:p>
-        </p:txBody>
-      </p:sp>
-      <p:sp>
-        <p:nvSpPr>
-          <p:cNvPr id="16" name="矩形 15">
-            <a:extLst>
-              <a:ext uri="{FF2B5EF4-FFF2-40B4-BE49-F238E27FC236}">
-                <a16:creationId xmlns:a16="http://schemas.microsoft.com/office/drawing/2014/main" id="{E6AF75EC-A39F-41E4-A265-F903339B0BBC}"/>
-              </a:ext>
-            </a:extLst>
-          </p:cNvPr>
-          <p:cNvSpPr>
-            <a:spLocks noGrp="1"/>
-          </p:cNvSpPr>
-          <p:nvPr/>
-        </p:nvSpPr>
-        <p:spPr>
-          <a:xfrm>
-            <a:off x="7334250" y="5105400"/>
-            <a:ext cx="3771900" cy="419100"/>
-          </a:xfrm>
-          <a:prstGeom prst="rect">
-            <a:avLst/>
-          </a:prstGeom>
-          <a:noFill/>
-          <a:ln w="0">
-            <a:noFill/>
-          </a:ln>
-        </p:spPr>
-        <p:txBody>
-          <a:bodyPr wrap="square" lIns="0" tIns="0" rIns="0" bIns="0" anchor="t">
-            <a:noAutofit/>
-          </a:bodyPr>
-          <a:lstStyle/>
-          <a:p>
-            <a:pPr algn="ctr">
-              <a:lnSpc>
-                <a:spcPct val="108000"/>
-              </a:lnSpc>
-              <a:buNone/>
-              <a:defRPr sz="1500" b="1">
-                <a:solidFill>
-                  <a:srgbClr val="155C93"/>
-                </a:solidFill>
-                <a:latin typeface="PingFang SC"/>
-                <a:ea typeface="PingFang SC"/>
-                <a:cs typeface="PingFang SC"/>
-              </a:defRPr>
-            </a:pPr>
-            <a:r>
-              <a:rPr sz="1500" b="1">
-                <a:solidFill>
-                  <a:srgbClr val="155C93"/>
-                </a:solidFill>
-                <a:latin typeface="PingFang SC"/>
-                <a:ea typeface="PingFang SC"/>
-                <a:cs typeface="PingFang SC"/>
-              </a:rPr>
-              <a:t>期待将这些经验应用到贵公司的算法研发工作中</a:t>
             </a:r>
           </a:p>
         </p:txBody>
